--- a/slides/shaerlock.pptx
+++ b/slides/shaerlock.pptx
@@ -1898,7 +1898,7 @@
                 <a:ea typeface="Calibri" pitchFamily="34" charset="-122"/>
                 <a:cs typeface="Calibri" pitchFamily="34" charset="-120"/>
               </a:rPr>
-              <a:t>Auditing iptables with separated detection and explanation.</a:t>
+              <a:t>AI-Driven Firewall Rule Analysis and Evasion Detection.</a:t>
             </a:r>
             <a:endParaRPr lang="en-US" sz="2000" dirty="0"/>
           </a:p>
